--- a/labs/130-linux-storage/assets/Linux Storage SUBMISSION TEMPLATE.pptx
+++ b/labs/130-linux-storage/assets/Linux Storage SUBMISSION TEMPLATE.pptx
@@ -6771,7 +6771,8 @@
           <a:lstStyle/>
           <a:p>
             <a:r>
-              <a:t>Screenshot 1</a:t>
+              <a:rPr sz="1800"/>
+              <a:t>Screenshot 1 Show your login information and that sudo echo works without a password prompt. Include a good computer joke in quotation marks.</a:t>
             </a:r>
           </a:p>
         </p:txBody>
@@ -6798,11 +6799,7 @@
             <a:normAutofit/>
           </a:bodyPr>
           <a:lstStyle/>
-          <a:p>
-            <a:r>
-              <a:t>Show your login information and that sudo echo works without a password prompt. Include a good computer joke in quotation marks.</a:t>
-            </a:r>
-          </a:p>
+          <a:p/>
         </p:txBody>
       </p:sp>
     </p:spTree>
@@ -6854,7 +6851,8 @@
           <a:lstStyle/>
           <a:p>
             <a:r>
-              <a:t>Screenshot 2</a:t>
+              <a:rPr sz="1800"/>
+              <a:t>Screenshot 2 Before and after logical-volume view showing lv-root increased by 5 GB and lv-home decreased by 5 GB. Highlight both exactly as shown in the lab.</a:t>
             </a:r>
           </a:p>
         </p:txBody>
@@ -6881,11 +6879,7 @@
             <a:normAutofit/>
           </a:bodyPr>
           <a:lstStyle/>
-          <a:p>
-            <a:r>
-              <a:t>Before and after logical-volume view showing lv-root increased by 5 GB and lv-home decreased by 5 GB. Highlight both exactly as shown in the lab.</a:t>
-            </a:r>
-          </a:p>
+          <a:p/>
         </p:txBody>
       </p:sp>
     </p:spTree>
@@ -6937,7 +6931,8 @@
           <a:lstStyle/>
           <a:p>
             <a:r>
-              <a:t>Screenshot 3</a:t>
+              <a:rPr sz="1800"/>
+              <a:t>Screenshot 3 pvdisplay output showing the new NVMe drive in the volume group and the old sda1 drive removed from it.</a:t>
             </a:r>
           </a:p>
         </p:txBody>
@@ -6964,11 +6959,7 @@
             <a:normAutofit/>
           </a:bodyPr>
           <a:lstStyle/>
-          <a:p>
-            <a:r>
-              <a:t>pvdisplay output showing the new NVMe drive in the volume group and the old sda1 drive removed from it.</a:t>
-            </a:r>
-          </a:p>
+          <a:p/>
         </p:txBody>
       </p:sp>
     </p:spTree>
@@ -7020,7 +7011,8 @@
           <a:lstStyle/>
           <a:p>
             <a:r>
-              <a:t>Screenshot 4</a:t>
+              <a:rPr sz="1800"/>
+              <a:t>Screenshot 4 PuTTY output showing that only the NVMe storage remains and there is no sda device left.</a:t>
             </a:r>
           </a:p>
         </p:txBody>
@@ -7047,11 +7039,7 @@
             <a:normAutofit/>
           </a:bodyPr>
           <a:lstStyle/>
-          <a:p>
-            <a:r>
-              <a:t>PuTTY output showing that only the NVMe storage remains and there is no sda device left.</a:t>
-            </a:r>
-          </a:p>
+          <a:p/>
         </p:txBody>
       </p:sp>
     </p:spTree>
@@ -7103,7 +7091,8 @@
           <a:lstStyle/>
           <a:p>
             <a:r>
-              <a:t>Screenshot 5</a:t>
+              <a:rPr sz="1800"/>
+              <a:t>Screenshot 5 Proof that quotes.txt still exists inside the mounted snapshot and no longer exists in the normal home directory.</a:t>
             </a:r>
           </a:p>
         </p:txBody>
@@ -7130,11 +7119,7 @@
             <a:normAutofit/>
           </a:bodyPr>
           <a:lstStyle/>
-          <a:p>
-            <a:r>
-              <a:t>Proof that quotes.txt still exists inside the mounted snapshot and no longer exists in the normal home directory.</a:t>
-            </a:r>
-          </a:p>
+          <a:p/>
         </p:txBody>
       </p:sp>
     </p:spTree>
